--- a/Lectures/Lecture 05.2 Interpreting LM with categorical.pptx
+++ b/Lectures/Lecture 05.2 Interpreting LM with categorical.pptx
@@ -473,7 +473,7 @@
           <a:p>
             <a:fld id="{D8644561-F434-46E9-9D5F-467389065464}" type="datetimeFigureOut">
               <a:rPr lang="en-GB" smtClean="0"/>
-              <a:t>24/07/2024</a:t>
+              <a:t>06/09/2024</a:t>
             </a:fld>
             <a:endParaRPr lang="en-GB"/>
           </a:p>
@@ -683,7 +683,7 @@
           <a:p>
             <a:fld id="{D8644561-F434-46E9-9D5F-467389065464}" type="datetimeFigureOut">
               <a:rPr lang="en-GB" smtClean="0"/>
-              <a:t>24/07/2024</a:t>
+              <a:t>06/09/2024</a:t>
             </a:fld>
             <a:endParaRPr lang="en-GB"/>
           </a:p>
@@ -905,7 +905,7 @@
           <a:p>
             <a:fld id="{D8644561-F434-46E9-9D5F-467389065464}" type="datetimeFigureOut">
               <a:rPr lang="en-GB" smtClean="0"/>
-              <a:t>24/07/2024</a:t>
+              <a:t>06/09/2024</a:t>
             </a:fld>
             <a:endParaRPr lang="en-GB"/>
           </a:p>
@@ -1844,7 +1844,7 @@
           <a:p>
             <a:fld id="{D8644561-F434-46E9-9D5F-467389065464}" type="datetimeFigureOut">
               <a:rPr lang="en-GB" smtClean="0"/>
-              <a:t>24/07/2024</a:t>
+              <a:t>06/09/2024</a:t>
             </a:fld>
             <a:endParaRPr lang="en-GB"/>
           </a:p>
@@ -1986,7 +1986,7 @@
           <a:p>
             <a:fld id="{D8644561-F434-46E9-9D5F-467389065464}" type="datetimeFigureOut">
               <a:rPr lang="en-GB" smtClean="0"/>
-              <a:t>24/07/2024</a:t>
+              <a:t>06/09/2024</a:t>
             </a:fld>
             <a:endParaRPr lang="en-GB"/>
           </a:p>
@@ -2099,7 +2099,7 @@
           <a:p>
             <a:fld id="{D8644561-F434-46E9-9D5F-467389065464}" type="datetimeFigureOut">
               <a:rPr lang="en-GB" smtClean="0"/>
-              <a:t>24/07/2024</a:t>
+              <a:t>06/09/2024</a:t>
             </a:fld>
             <a:endParaRPr lang="en-GB"/>
           </a:p>
@@ -2412,7 +2412,7 @@
           <a:p>
             <a:fld id="{D8644561-F434-46E9-9D5F-467389065464}" type="datetimeFigureOut">
               <a:rPr lang="en-GB" smtClean="0"/>
-              <a:t>24/07/2024</a:t>
+              <a:t>06/09/2024</a:t>
             </a:fld>
             <a:endParaRPr lang="en-GB"/>
           </a:p>
@@ -2705,7 +2705,7 @@
           <a:p>
             <a:fld id="{D8644561-F434-46E9-9D5F-467389065464}" type="datetimeFigureOut">
               <a:rPr lang="en-GB" smtClean="0"/>
-              <a:t>24/07/2024</a:t>
+              <a:t>06/09/2024</a:t>
             </a:fld>
             <a:endParaRPr lang="en-GB"/>
           </a:p>
@@ -2948,7 +2948,7 @@
           <a:p>
             <a:fld id="{D8644561-F434-46E9-9D5F-467389065464}" type="datetimeFigureOut">
               <a:rPr lang="en-GB" smtClean="0"/>
-              <a:t>24/07/2024</a:t>
+              <a:t>06/09/2024</a:t>
             </a:fld>
             <a:endParaRPr lang="en-GB"/>
           </a:p>
@@ -3435,13 +3435,13 @@
   <p:clrMapOvr>
     <a:masterClrMapping/>
   </p:clrMapOvr>
-  <mc:AlternateContent xmlns:mc="http://schemas.openxmlformats.org/markup-compatibility/2006" xmlns:p14="http://schemas.microsoft.com/office/powerpoint/2010/main">
-    <mc:Choice Requires="p14">
+  <mc:AlternateContent xmlns:mc="http://schemas.openxmlformats.org/markup-compatibility/2006">
+    <mc:Choice xmlns:p14="http://schemas.microsoft.com/office/powerpoint/2010/main" Requires="p14">
       <p:transition spd="med" p14:dur="700">
         <p:fade/>
       </p:transition>
     </mc:Choice>
-    <mc:Fallback xmlns="">
+    <mc:Fallback>
       <p:transition spd="med">
         <p:fade/>
       </p:transition>
@@ -3741,13 +3741,13 @@
   <p:clrMapOvr>
     <a:masterClrMapping/>
   </p:clrMapOvr>
-  <mc:AlternateContent xmlns:mc="http://schemas.openxmlformats.org/markup-compatibility/2006" xmlns:p14="http://schemas.microsoft.com/office/powerpoint/2010/main">
-    <mc:Choice Requires="p14">
+  <mc:AlternateContent xmlns:mc="http://schemas.openxmlformats.org/markup-compatibility/2006">
+    <mc:Choice xmlns:p14="http://schemas.microsoft.com/office/powerpoint/2010/main" Requires="p14">
       <p:transition spd="med" p14:dur="700">
         <p:fade/>
       </p:transition>
     </mc:Choice>
-    <mc:Fallback xmlns="">
+    <mc:Fallback>
       <p:transition spd="med">
         <p:fade/>
       </p:transition>
@@ -5391,13 +5391,13 @@
   <p:clrMapOvr>
     <a:masterClrMapping/>
   </p:clrMapOvr>
-  <mc:AlternateContent xmlns:mc="http://schemas.openxmlformats.org/markup-compatibility/2006" xmlns:p14="http://schemas.microsoft.com/office/powerpoint/2010/main">
-    <mc:Choice Requires="p14">
+  <mc:AlternateContent xmlns:mc="http://schemas.openxmlformats.org/markup-compatibility/2006">
+    <mc:Choice xmlns:p14="http://schemas.microsoft.com/office/powerpoint/2010/main" Requires="p14">
       <p:transition spd="med" p14:dur="700">
         <p:fade/>
       </p:transition>
     </mc:Choice>
-    <mc:Fallback xmlns="">
+    <mc:Fallback>
       <p:transition spd="med">
         <p:fade/>
       </p:transition>
@@ -6175,13 +6175,13 @@
   <p:clrMapOvr>
     <a:masterClrMapping/>
   </p:clrMapOvr>
-  <mc:AlternateContent xmlns:mc="http://schemas.openxmlformats.org/markup-compatibility/2006" xmlns:p14="http://schemas.microsoft.com/office/powerpoint/2010/main">
-    <mc:Choice Requires="p14">
+  <mc:AlternateContent xmlns:mc="http://schemas.openxmlformats.org/markup-compatibility/2006">
+    <mc:Choice xmlns:p14="http://schemas.microsoft.com/office/powerpoint/2010/main" Requires="p14">
       <p:transition spd="med" p14:dur="700">
         <p:fade/>
       </p:transition>
     </mc:Choice>
-    <mc:Fallback xmlns="">
+    <mc:Fallback>
       <p:transition spd="med">
         <p:fade/>
       </p:transition>
@@ -6245,13 +6245,13 @@
   <p:clrMapOvr>
     <a:masterClrMapping/>
   </p:clrMapOvr>
-  <mc:AlternateContent xmlns:mc="http://schemas.openxmlformats.org/markup-compatibility/2006" xmlns:p14="http://schemas.microsoft.com/office/powerpoint/2010/main">
-    <mc:Choice Requires="p14">
+  <mc:AlternateContent xmlns:mc="http://schemas.openxmlformats.org/markup-compatibility/2006">
+    <mc:Choice xmlns:p14="http://schemas.microsoft.com/office/powerpoint/2010/main" Requires="p14">
       <p:transition spd="med" p14:dur="700">
         <p:fade/>
       </p:transition>
     </mc:Choice>
-    <mc:Fallback xmlns="">
+    <mc:Fallback>
       <p:transition spd="med">
         <p:fade/>
       </p:transition>
@@ -7282,13 +7282,13 @@
   <p:clrMapOvr>
     <a:masterClrMapping/>
   </p:clrMapOvr>
-  <mc:AlternateContent xmlns:mc="http://schemas.openxmlformats.org/markup-compatibility/2006" xmlns:p14="http://schemas.microsoft.com/office/powerpoint/2010/main">
-    <mc:Choice Requires="p14">
+  <mc:AlternateContent xmlns:mc="http://schemas.openxmlformats.org/markup-compatibility/2006">
+    <mc:Choice xmlns:p14="http://schemas.microsoft.com/office/powerpoint/2010/main" Requires="p14">
       <p:transition spd="med" p14:dur="700">
         <p:fade/>
       </p:transition>
     </mc:Choice>
-    <mc:Fallback xmlns="">
+    <mc:Fallback>
       <p:transition spd="med">
         <p:fade/>
       </p:transition>
@@ -7860,13 +7860,13 @@
   <p:clrMapOvr>
     <a:masterClrMapping/>
   </p:clrMapOvr>
-  <mc:AlternateContent xmlns:mc="http://schemas.openxmlformats.org/markup-compatibility/2006" xmlns:p14="http://schemas.microsoft.com/office/powerpoint/2010/main">
-    <mc:Choice Requires="p14">
+  <mc:AlternateContent xmlns:mc="http://schemas.openxmlformats.org/markup-compatibility/2006">
+    <mc:Choice xmlns:p14="http://schemas.microsoft.com/office/powerpoint/2010/main" Requires="p14">
       <p:transition spd="med" p14:dur="700">
         <p:fade/>
       </p:transition>
     </mc:Choice>
-    <mc:Fallback xmlns="">
+    <mc:Fallback>
       <p:transition spd="med">
         <p:fade/>
       </p:transition>
@@ -8179,13 +8179,13 @@
   <p:clrMapOvr>
     <a:masterClrMapping/>
   </p:clrMapOvr>
-  <mc:AlternateContent xmlns:mc="http://schemas.openxmlformats.org/markup-compatibility/2006" xmlns:p14="http://schemas.microsoft.com/office/powerpoint/2010/main">
-    <mc:Choice Requires="p14">
+  <mc:AlternateContent xmlns:mc="http://schemas.openxmlformats.org/markup-compatibility/2006">
+    <mc:Choice xmlns:p14="http://schemas.microsoft.com/office/powerpoint/2010/main" Requires="p14">
       <p:transition spd="med" p14:dur="700">
         <p:fade/>
       </p:transition>
     </mc:Choice>
-    <mc:Fallback xmlns="">
+    <mc:Fallback>
       <p:transition spd="med">
         <p:fade/>
       </p:transition>
@@ -8951,8 +8951,8 @@
           </p:spPr>
         </p:pic>
       </p:grpSp>
-      <mc:AlternateContent xmlns:mc="http://schemas.openxmlformats.org/markup-compatibility/2006">
-        <mc:Choice xmlns:a14="http://schemas.microsoft.com/office/drawing/2010/main" Requires="a14">
+      <mc:AlternateContent xmlns:mc="http://schemas.openxmlformats.org/markup-compatibility/2006" xmlns:a14="http://schemas.microsoft.com/office/drawing/2010/main">
+        <mc:Choice Requires="a14">
           <p:sp>
             <p:nvSpPr>
               <p:cNvPr id="12" name="Content Placeholder 2">
@@ -9537,7 +9537,7 @@
             </p:txBody>
           </p:sp>
         </mc:Choice>
-        <mc:Fallback>
+        <mc:Fallback xmlns="">
           <p:sp>
             <p:nvSpPr>
               <p:cNvPr id="12" name="Content Placeholder 2">
@@ -9592,13 +9592,13 @@
   <p:clrMapOvr>
     <a:masterClrMapping/>
   </p:clrMapOvr>
-  <mc:AlternateContent xmlns:mc="http://schemas.openxmlformats.org/markup-compatibility/2006" xmlns:p14="http://schemas.microsoft.com/office/powerpoint/2010/main">
-    <mc:Choice Requires="p14">
+  <mc:AlternateContent xmlns:mc="http://schemas.openxmlformats.org/markup-compatibility/2006">
+    <mc:Choice xmlns:p14="http://schemas.microsoft.com/office/powerpoint/2010/main" Requires="p14">
       <p:transition spd="med" p14:dur="700">
         <p:fade/>
       </p:transition>
     </mc:Choice>
-    <mc:Fallback xmlns="">
+    <mc:Fallback>
       <p:transition spd="med">
         <p:fade/>
       </p:transition>
@@ -10422,13 +10422,13 @@
   <p:clrMapOvr>
     <a:masterClrMapping/>
   </p:clrMapOvr>
-  <mc:AlternateContent xmlns:mc="http://schemas.openxmlformats.org/markup-compatibility/2006" xmlns:p14="http://schemas.microsoft.com/office/powerpoint/2010/main">
-    <mc:Choice Requires="p14">
+  <mc:AlternateContent xmlns:mc="http://schemas.openxmlformats.org/markup-compatibility/2006">
+    <mc:Choice xmlns:p14="http://schemas.microsoft.com/office/powerpoint/2010/main" Requires="p14">
       <p:transition spd="med" p14:dur="700">
         <p:fade/>
       </p:transition>
     </mc:Choice>
-    <mc:Fallback xmlns="">
+    <mc:Fallback>
       <p:transition spd="med">
         <p:fade/>
       </p:transition>
@@ -11293,6 +11293,18 @@
   <p:clrMapOvr>
     <a:masterClrMapping/>
   </p:clrMapOvr>
+  <mc:AlternateContent xmlns:mc="http://schemas.openxmlformats.org/markup-compatibility/2006">
+    <mc:Choice xmlns:p14="http://schemas.microsoft.com/office/powerpoint/2010/main" Requires="p14">
+      <p:transition spd="med" p14:dur="700">
+        <p:fade/>
+      </p:transition>
+    </mc:Choice>
+    <mc:Fallback>
+      <p:transition spd="med">
+        <p:fade/>
+      </p:transition>
+    </mc:Fallback>
+  </mc:AlternateContent>
 </p:sld>
 </file>
 
@@ -11551,13 +11563,13 @@
   <p:clrMapOvr>
     <a:masterClrMapping/>
   </p:clrMapOvr>
-  <mc:AlternateContent xmlns:mc="http://schemas.openxmlformats.org/markup-compatibility/2006" xmlns:p14="http://schemas.microsoft.com/office/powerpoint/2010/main">
-    <mc:Choice Requires="p14">
+  <mc:AlternateContent xmlns:mc="http://schemas.openxmlformats.org/markup-compatibility/2006">
+    <mc:Choice xmlns:p14="http://schemas.microsoft.com/office/powerpoint/2010/main" Requires="p14">
       <p:transition spd="med" p14:dur="700">
         <p:fade/>
       </p:transition>
     </mc:Choice>
-    <mc:Fallback xmlns="">
+    <mc:Fallback>
       <p:transition spd="med">
         <p:fade/>
       </p:transition>
@@ -12081,6 +12093,18 @@
   <p:clrMapOvr>
     <a:masterClrMapping/>
   </p:clrMapOvr>
+  <mc:AlternateContent xmlns:mc="http://schemas.openxmlformats.org/markup-compatibility/2006">
+    <mc:Choice xmlns:p14="http://schemas.microsoft.com/office/powerpoint/2010/main" Requires="p14">
+      <p:transition spd="med" p14:dur="700">
+        <p:fade/>
+      </p:transition>
+    </mc:Choice>
+    <mc:Fallback>
+      <p:transition spd="med">
+        <p:fade/>
+      </p:transition>
+    </mc:Fallback>
+  </mc:AlternateContent>
 </p:sld>
 </file>
 
@@ -12456,6 +12480,18 @@
   <p:clrMapOvr>
     <a:masterClrMapping/>
   </p:clrMapOvr>
+  <mc:AlternateContent xmlns:mc="http://schemas.openxmlformats.org/markup-compatibility/2006">
+    <mc:Choice xmlns:p14="http://schemas.microsoft.com/office/powerpoint/2010/main" Requires="p14">
+      <p:transition spd="med" p14:dur="700">
+        <p:fade/>
+      </p:transition>
+    </mc:Choice>
+    <mc:Fallback>
+      <p:transition spd="med">
+        <p:fade/>
+      </p:transition>
+    </mc:Fallback>
+  </mc:AlternateContent>
 </p:sld>
 </file>
 
@@ -12492,7 +12528,12 @@
             <p:ph type="title"/>
           </p:nvPr>
         </p:nvSpPr>
-        <p:spPr/>
+        <p:spPr>
+          <a:xfrm>
+            <a:off x="0" y="0"/>
+            <a:ext cx="12192000" cy="1325563"/>
+          </a:xfrm>
+        </p:spPr>
         <p:txBody>
           <a:bodyPr/>
           <a:lstStyle/>
@@ -12520,7 +12561,12 @@
             <p:ph idx="1"/>
           </p:nvPr>
         </p:nvSpPr>
-        <p:spPr/>
+        <p:spPr>
+          <a:xfrm>
+            <a:off x="0" y="1426613"/>
+            <a:ext cx="12192000" cy="5240194"/>
+          </a:xfrm>
+        </p:spPr>
         <p:txBody>
           <a:bodyPr/>
           <a:lstStyle/>
@@ -12571,31 +12617,6 @@
               </a:rPr>
               <a:t>The model formula</a:t>
             </a:r>
-          </a:p>
-        </p:txBody>
-      </p:sp>
-      <p:sp>
-        <p:nvSpPr>
-          <p:cNvPr id="8" name="Picture Placeholder 7">
-            <a:extLst>
-              <a:ext uri="{FF2B5EF4-FFF2-40B4-BE49-F238E27FC236}">
-                <a16:creationId xmlns:a16="http://schemas.microsoft.com/office/drawing/2014/main" id="{E1E11959-B2C5-52AB-DA39-4B5312CB5CBF}"/>
-              </a:ext>
-            </a:extLst>
-          </p:cNvPr>
-          <p:cNvSpPr>
-            <a:spLocks noGrp="1"/>
-          </p:cNvSpPr>
-          <p:nvPr>
-            <p:ph type="pic" sz="quarter" idx="10"/>
-          </p:nvPr>
-        </p:nvSpPr>
-        <p:spPr/>
-        <p:txBody>
-          <a:bodyPr/>
-          <a:lstStyle/>
-          <a:p>
-            <a:endParaRPr lang="en-GB"/>
           </a:p>
         </p:txBody>
       </p:sp>
@@ -12609,13 +12630,13 @@
   <p:clrMapOvr>
     <a:masterClrMapping/>
   </p:clrMapOvr>
-  <mc:AlternateContent xmlns:mc="http://schemas.openxmlformats.org/markup-compatibility/2006" xmlns:p14="http://schemas.microsoft.com/office/powerpoint/2010/main">
-    <mc:Choice Requires="p14">
+  <mc:AlternateContent xmlns:mc="http://schemas.openxmlformats.org/markup-compatibility/2006">
+    <mc:Choice xmlns:p14="http://schemas.microsoft.com/office/powerpoint/2010/main" Requires="p14">
       <p:transition spd="med" p14:dur="700">
         <p:fade/>
       </p:transition>
     </mc:Choice>
-    <mc:Fallback xmlns="">
+    <mc:Fallback>
       <p:transition spd="med">
         <p:fade/>
       </p:transition>
@@ -12981,13 +13002,13 @@
   <p:clrMapOvr>
     <a:masterClrMapping/>
   </p:clrMapOvr>
-  <mc:AlternateContent xmlns:mc="http://schemas.openxmlformats.org/markup-compatibility/2006" xmlns:p14="http://schemas.microsoft.com/office/powerpoint/2010/main">
-    <mc:Choice Requires="p14">
+  <mc:AlternateContent xmlns:mc="http://schemas.openxmlformats.org/markup-compatibility/2006">
+    <mc:Choice xmlns:p14="http://schemas.microsoft.com/office/powerpoint/2010/main" Requires="p14">
       <p:transition spd="med" p14:dur="700">
         <p:fade/>
       </p:transition>
     </mc:Choice>
-    <mc:Fallback xmlns="">
+    <mc:Fallback>
       <p:transition spd="med">
         <p:fade/>
       </p:transition>
@@ -13128,13 +13149,13 @@
   <p:clrMapOvr>
     <a:masterClrMapping/>
   </p:clrMapOvr>
-  <mc:AlternateContent xmlns:mc="http://schemas.openxmlformats.org/markup-compatibility/2006" xmlns:p14="http://schemas.microsoft.com/office/powerpoint/2010/main">
-    <mc:Choice Requires="p14">
+  <mc:AlternateContent xmlns:mc="http://schemas.openxmlformats.org/markup-compatibility/2006">
+    <mc:Choice xmlns:p14="http://schemas.microsoft.com/office/powerpoint/2010/main" Requires="p14">
       <p:transition spd="med" p14:dur="700">
         <p:fade/>
       </p:transition>
     </mc:Choice>
-    <mc:Fallback xmlns="">
+    <mc:Fallback>
       <p:transition spd="med">
         <p:fade/>
       </p:transition>
@@ -13475,13 +13496,13 @@
   <p:clrMapOvr>
     <a:masterClrMapping/>
   </p:clrMapOvr>
-  <mc:AlternateContent xmlns:mc="http://schemas.openxmlformats.org/markup-compatibility/2006" xmlns:p14="http://schemas.microsoft.com/office/powerpoint/2010/main">
-    <mc:Choice Requires="p14">
+  <mc:AlternateContent xmlns:mc="http://schemas.openxmlformats.org/markup-compatibility/2006">
+    <mc:Choice xmlns:p14="http://schemas.microsoft.com/office/powerpoint/2010/main" Requires="p14">
       <p:transition spd="med" p14:dur="700">
         <p:fade/>
       </p:transition>
     </mc:Choice>
-    <mc:Fallback xmlns="">
+    <mc:Fallback>
       <p:transition spd="med">
         <p:fade/>
       </p:transition>
@@ -13669,13 +13690,13 @@
   <p:clrMapOvr>
     <a:masterClrMapping/>
   </p:clrMapOvr>
-  <mc:AlternateContent xmlns:mc="http://schemas.openxmlformats.org/markup-compatibility/2006" xmlns:p14="http://schemas.microsoft.com/office/powerpoint/2010/main">
-    <mc:Choice Requires="p14">
+  <mc:AlternateContent xmlns:mc="http://schemas.openxmlformats.org/markup-compatibility/2006">
+    <mc:Choice xmlns:p14="http://schemas.microsoft.com/office/powerpoint/2010/main" Requires="p14">
       <p:transition spd="med" p14:dur="700">
         <p:fade/>
       </p:transition>
     </mc:Choice>
-    <mc:Fallback xmlns="">
+    <mc:Fallback>
       <p:transition spd="med">
         <p:fade/>
       </p:transition>
@@ -15444,13 +15465,13 @@
   <p:clrMapOvr>
     <a:masterClrMapping/>
   </p:clrMapOvr>
-  <mc:AlternateContent xmlns:mc="http://schemas.openxmlformats.org/markup-compatibility/2006" xmlns:p14="http://schemas.microsoft.com/office/powerpoint/2010/main">
-    <mc:Choice Requires="p14">
+  <mc:AlternateContent xmlns:mc="http://schemas.openxmlformats.org/markup-compatibility/2006">
+    <mc:Choice xmlns:p14="http://schemas.microsoft.com/office/powerpoint/2010/main" Requires="p14">
       <p:transition spd="med" p14:dur="700">
         <p:fade/>
       </p:transition>
     </mc:Choice>
-    <mc:Fallback xmlns="">
+    <mc:Fallback>
       <p:transition spd="med">
         <p:fade/>
       </p:transition>
@@ -16286,13 +16307,13 @@
   <p:clrMapOvr>
     <a:masterClrMapping/>
   </p:clrMapOvr>
-  <mc:AlternateContent xmlns:mc="http://schemas.openxmlformats.org/markup-compatibility/2006" xmlns:p14="http://schemas.microsoft.com/office/powerpoint/2010/main">
-    <mc:Choice Requires="p14">
+  <mc:AlternateContent xmlns:mc="http://schemas.openxmlformats.org/markup-compatibility/2006">
+    <mc:Choice xmlns:p14="http://schemas.microsoft.com/office/powerpoint/2010/main" Requires="p14">
       <p:transition spd="med" p14:dur="700">
         <p:fade/>
       </p:transition>
     </mc:Choice>
-    <mc:Fallback xmlns="">
+    <mc:Fallback>
       <p:transition spd="med">
         <p:fade/>
       </p:transition>
